--- a/public/pitch/MyFlove_Pitchdeck_4.2.pptx
+++ b/public/pitch/MyFlove_Pitchdeck_4.2.pptx
@@ -28,6 +28,7 @@
     <p:sldId id="271" r:id="rId22"/>
     <p:sldId id="272" r:id="rId23"/>
     <p:sldId id="273" r:id="rId24"/>
+    <p:sldId id="279" r:id="rId30"/>
   </p:sldIdLst>
   <p:sldSz cx="12191695" cy="6858000" type="screen4x3"/>
   <p:notesSz cx="6858000" cy="9144000"/>
@@ -14851,6 +14852,229 @@
                 <a:latin typeface="Nunito Sans"/>
               </a:rPr>
               <a:t>myflove.lovable.app  ·  version 4.1</a:t>
+            </a:r>
+          </a:p>
+        </p:txBody>
+      </p:sp>
+    </p:spTree>
+  </p:cSld>
+  <p:clrMapOvr>
+    <a:masterClrMapping/>
+  </p:clrMapOvr>
+</p:sld>
+</file>
+
+<file path=ppt/slides/slide24.xml><?xml version="1.0" encoding="utf-8"?>
+<p:sld xmlns:a="http://schemas.openxmlformats.org/drawingml/2006/main" xmlns:p="http://schemas.openxmlformats.org/presentationml/2006/main" xmlns:r="http://schemas.openxmlformats.org/officeDocument/2006/relationships">
+  <p:cSld>
+    <p:spTree>
+      <p:nvGrpSpPr>
+        <p:cNvPr id="1" name=""/>
+        <p:cNvGrpSpPr/>
+        <p:nvPr/>
+      </p:nvGrpSpPr>
+      <p:grpSpPr/>
+      <p:sp>
+        <p:nvSpPr>
+          <p:cNvPr id="2" name="Rectangle 1"/>
+          <p:cNvSpPr/>
+          <p:nvPr/>
+        </p:nvSpPr>
+        <p:spPr>
+          <a:xfrm>
+            <a:off x="0" y="0"/>
+            <a:ext cx="12191695" cy="6858000"/>
+          </a:xfrm>
+          <a:prstGeom prst="rect">
+            <a:avLst/>
+          </a:prstGeom>
+          <a:solidFill>
+            <a:srgbClr val="FBF2F8"/>
+          </a:solidFill>
+          <a:ln>
+            <a:noFill/>
+          </a:ln>
+        </p:spPr>
+        <p:style>
+          <a:lnRef idx="1">
+            <a:schemeClr val="accent1"/>
+          </a:lnRef>
+          <a:fillRef idx="3">
+            <a:schemeClr val="accent1"/>
+          </a:fillRef>
+          <a:effectRef idx="2">
+            <a:schemeClr val="accent1"/>
+          </a:effectRef>
+          <a:fontRef idx="minor">
+            <a:schemeClr val="lt1"/>
+          </a:fontRef>
+        </p:style>
+        <p:txBody>
+          <a:bodyPr rtlCol="0" anchor="ctr"/>
+          <a:lstStyle/>
+          <a:p>
+            <a:pPr algn="ctr"/>
+          </a:p>
+        </p:txBody>
+      </p:sp>
+      <p:sp>
+        <p:nvSpPr>
+          <p:cNvPr id="3" name="TextBox 2"/>
+          <p:cNvSpPr txBox="1"/>
+          <p:nvPr/>
+        </p:nvSpPr>
+        <p:spPr>
+          <a:xfrm>
+            <a:off x="731501" y="480060"/>
+            <a:ext cx="10728693" cy="1371600"/>
+          </a:xfrm>
+          <a:prstGeom prst="rect">
+            <a:avLst/>
+          </a:prstGeom>
+          <a:noFill/>
+        </p:spPr>
+        <p:txBody>
+          <a:bodyPr wrap="square">
+            <a:spAutoFit/>
+          </a:bodyPr>
+          <a:lstStyle/>
+          <a:p>
+            <a:r>
+              <a:rPr sz="4000" b="1">
+                <a:solidFill>
+                  <a:srgbClr val="3A2D50"/>
+                </a:solidFill>
+                <a:latin typeface="Calibri"/>
+              </a:rPr>
+              <a:t>Live product demo — 20 seconds</a:t>
+            </a:r>
+          </a:p>
+          <a:p>
+            <a:r>
+              <a:rPr sz="2000">
+                <a:solidFill>
+                  <a:srgbClr val="695C82"/>
+                </a:solidFill>
+                <a:latin typeface="Calibri"/>
+              </a:rPr>
+              <a:t>QuickFlow  →  Flow  →  My Day. Real screens from the live app.</a:t>
+            </a:r>
+          </a:p>
+        </p:txBody>
+      </p:sp>
+      <p:pic>
+        <p:nvPicPr>
+          <p:cNvPr id="4" name="Picture 3" descr="myflove-demo-quickflow.jpg"/>
+          <p:cNvPicPr>
+            <a:picLocks noChangeAspect="1"/>
+          </p:cNvPicPr>
+          <p:nvPr/>
+        </p:nvPicPr>
+        <p:blipFill>
+          <a:blip r:embed="rId2"/>
+          <a:stretch>
+            <a:fillRect/>
+          </a:stretch>
+        </p:blipFill>
+        <p:spPr>
+          <a:xfrm>
+            <a:off x="731501" y="2331720"/>
+            <a:ext cx="3413675" cy="1920192"/>
+          </a:xfrm>
+          <a:prstGeom prst="rect">
+            <a:avLst/>
+          </a:prstGeom>
+        </p:spPr>
+      </p:pic>
+      <p:pic>
+        <p:nvPicPr>
+          <p:cNvPr id="5" name="Picture 4" descr="myflove-demo-flow.jpg"/>
+          <p:cNvPicPr>
+            <a:picLocks noChangeAspect="1"/>
+          </p:cNvPicPr>
+          <p:nvPr/>
+        </p:nvPicPr>
+        <p:blipFill>
+          <a:blip r:embed="rId3"/>
+          <a:stretch>
+            <a:fillRect/>
+          </a:stretch>
+        </p:blipFill>
+        <p:spPr>
+          <a:xfrm>
+            <a:off x="4389009" y="2331720"/>
+            <a:ext cx="3413675" cy="1920192"/>
+          </a:xfrm>
+          <a:prstGeom prst="rect">
+            <a:avLst/>
+          </a:prstGeom>
+        </p:spPr>
+      </p:pic>
+      <p:pic>
+        <p:nvPicPr>
+          <p:cNvPr id="6" name="Picture 5" descr="myflove-demo-minday.jpg"/>
+          <p:cNvPicPr>
+            <a:picLocks noChangeAspect="1"/>
+          </p:cNvPicPr>
+          <p:nvPr/>
+        </p:nvPicPr>
+        <p:blipFill>
+          <a:blip r:embed="rId4"/>
+          <a:stretch>
+            <a:fillRect/>
+          </a:stretch>
+        </p:blipFill>
+        <p:spPr>
+          <a:xfrm>
+            <a:off x="8046518" y="2331720"/>
+            <a:ext cx="3413675" cy="1920192"/>
+          </a:xfrm>
+          <a:prstGeom prst="rect">
+            <a:avLst/>
+          </a:prstGeom>
+        </p:spPr>
+      </p:pic>
+      <p:sp>
+        <p:nvSpPr>
+          <p:cNvPr id="7" name="TextBox 6"/>
+          <p:cNvSpPr txBox="1"/>
+          <p:nvPr/>
+        </p:nvSpPr>
+        <p:spPr>
+          <a:xfrm>
+            <a:off x="731501" y="4457652"/>
+            <a:ext cx="10728693" cy="1371600"/>
+          </a:xfrm>
+          <a:prstGeom prst="rect">
+            <a:avLst/>
+          </a:prstGeom>
+          <a:noFill/>
+        </p:spPr>
+        <p:txBody>
+          <a:bodyPr wrap="square">
+            <a:spAutoFit/>
+          </a:bodyPr>
+          <a:lstStyle/>
+          <a:p>
+            <a:r>
+              <a:rPr sz="2600" b="1">
+                <a:solidFill>
+                  <a:srgbClr val="6E5AA6"/>
+                </a:solidFill>
+                <a:latin typeface="Calibri"/>
+              </a:rPr>
+              <a:t>“The goal isn’t to get more done. It’s to make the day more doable.”</a:t>
+            </a:r>
+          </a:p>
+          <a:p>
+            <a:r>
+              <a:rPr sz="1600">
+                <a:solidFill>
+                  <a:srgbClr val="695C82"/>
+                </a:solidFill>
+                <a:latin typeface="Calibri"/>
+              </a:rPr>
+              <a:t>Video file: myflove-demo-20s.mp4</a:t>
             </a:r>
           </a:p>
         </p:txBody>

--- a/public/pitch/MyFlove_Pitchdeck_4.2.pptx
+++ b/public/pitch/MyFlove_Pitchdeck_4.2.pptx
@@ -14946,7 +14946,7 @@
                 </a:solidFill>
                 <a:latin typeface="Calibri"/>
               </a:rPr>
-              <a:t>Live product demo — 20 seconds</a:t>
+              <a:t>Live product demo — 27 seconds</a:t>
             </a:r>
           </a:p>
           <a:p>
@@ -14957,14 +14957,59 @@
                 </a:solidFill>
                 <a:latin typeface="Calibri"/>
               </a:rPr>
-              <a:t>QuickFlow  →  Flow  →  My Day. Real screens from the live app.</a:t>
+              <a:t>QuickFlow → Flow → the plan adapts to capacity → My Day. Real screens from the live app.</a:t>
+            </a:r>
+          </a:p>
+        </p:txBody>
+      </p:sp>
+      <p:sp>
+        <p:nvSpPr>
+          <p:cNvPr id="7" name="TextBox 6"/>
+          <p:cNvSpPr txBox="1"/>
+          <p:nvPr/>
+        </p:nvSpPr>
+        <p:spPr>
+          <a:xfrm>
+            <a:off x="731501" y="4457652"/>
+            <a:ext cx="10728693" cy="1371600"/>
+          </a:xfrm>
+          <a:prstGeom prst="rect">
+            <a:avLst/>
+          </a:prstGeom>
+          <a:noFill/>
+        </p:spPr>
+        <p:txBody>
+          <a:bodyPr wrap="square">
+            <a:spAutoFit/>
+          </a:bodyPr>
+          <a:lstStyle/>
+          <a:p>
+            <a:r>
+              <a:rPr sz="2600" b="1">
+                <a:solidFill>
+                  <a:srgbClr val="6E5AA6"/>
+                </a:solidFill>
+                <a:latin typeface="Calibri"/>
+              </a:rPr>
+              <a:t>“The goal isn’t to get more done. It’s to make the day more doable.”</a:t>
+            </a:r>
+          </a:p>
+          <a:p>
+            <a:r>
+              <a:rPr sz="1600">
+                <a:solidFill>
+                  <a:srgbClr val="695C82"/>
+                </a:solidFill>
+                <a:latin typeface="Calibri"/>
+              </a:rPr>
+              <a:t>Video file: myflove-demo-20s.mp4  ·  27 s  ·  same tasks planned at high energy (4 h) vs low energy (30 min)</a:t>
             </a:r>
           </a:p>
         </p:txBody>
       </p:sp>
       <p:pic>
         <p:nvPicPr>
-          <p:cNvPr id="4" name="Picture 3" descr="myflove-demo-quickflow.jpg"/>
+          <p:cNvPr id="8" name="Picture 7" descr="image.jpg"/>
           <p:cNvPicPr>
             <a:picLocks noChangeAspect="1"/>
           </p:cNvPicPr>
@@ -14978,8 +15023,8 @@
         </p:blipFill>
         <p:spPr>
           <a:xfrm>
-            <a:off x="731501" y="2331720"/>
-            <a:ext cx="3413675" cy="1920192"/>
+            <a:off x="731501" y="2500000"/>
+            <a:ext cx="2017738" cy="1134977"/>
           </a:xfrm>
           <a:prstGeom prst="rect">
             <a:avLst/>
@@ -14988,7 +15033,7 @@
       </p:pic>
       <p:pic>
         <p:nvPicPr>
-          <p:cNvPr id="5" name="Picture 4" descr="myflove-demo-flow.jpg"/>
+          <p:cNvPr id="9" name="Picture 8" descr="image.jpg"/>
           <p:cNvPicPr>
             <a:picLocks noChangeAspect="1"/>
           </p:cNvPicPr>
@@ -15002,8 +15047,8 @@
         </p:blipFill>
         <p:spPr>
           <a:xfrm>
-            <a:off x="4389009" y="2331720"/>
-            <a:ext cx="3413675" cy="1920192"/>
+            <a:off x="2909239" y="2500000"/>
+            <a:ext cx="2017738" cy="1134977"/>
           </a:xfrm>
           <a:prstGeom prst="rect">
             <a:avLst/>
@@ -15012,7 +15057,55 @@
       </p:pic>
       <p:pic>
         <p:nvPicPr>
-          <p:cNvPr id="6" name="Picture 5" descr="myflove-demo-minday.jpg"/>
+          <p:cNvPr id="10" name="Picture 9" descr="myflove-demo-adapt-a.jpg"/>
+          <p:cNvPicPr>
+            <a:picLocks noChangeAspect="1"/>
+          </p:cNvPicPr>
+          <p:nvPr/>
+        </p:nvPicPr>
+        <p:blipFill>
+          <a:blip r:embed="rId5"/>
+          <a:stretch>
+            <a:fillRect/>
+          </a:stretch>
+        </p:blipFill>
+        <p:spPr>
+          <a:xfrm>
+            <a:off x="5086977" y="2500000"/>
+            <a:ext cx="2017738" cy="1134977"/>
+          </a:xfrm>
+          <a:prstGeom prst="rect">
+            <a:avLst/>
+          </a:prstGeom>
+        </p:spPr>
+      </p:pic>
+      <p:pic>
+        <p:nvPicPr>
+          <p:cNvPr id="11" name="Picture 10" descr="myflove-demo-adapt-b.jpg"/>
+          <p:cNvPicPr>
+            <a:picLocks noChangeAspect="1"/>
+          </p:cNvPicPr>
+          <p:nvPr/>
+        </p:nvPicPr>
+        <p:blipFill>
+          <a:blip r:embed="rId6"/>
+          <a:stretch>
+            <a:fillRect/>
+          </a:stretch>
+        </p:blipFill>
+        <p:spPr>
+          <a:xfrm>
+            <a:off x="7264715" y="2500000"/>
+            <a:ext cx="2017738" cy="1134977"/>
+          </a:xfrm>
+          <a:prstGeom prst="rect">
+            <a:avLst/>
+          </a:prstGeom>
+        </p:spPr>
+      </p:pic>
+      <p:pic>
+        <p:nvPicPr>
+          <p:cNvPr id="12" name="Picture 11" descr="image.jpg"/>
           <p:cNvPicPr>
             <a:picLocks noChangeAspect="1"/>
           </p:cNvPicPr>
@@ -15026,59 +15119,14 @@
         </p:blipFill>
         <p:spPr>
           <a:xfrm>
-            <a:off x="8046518" y="2331720"/>
-            <a:ext cx="3413675" cy="1920192"/>
+            <a:off x="9442453" y="2500000"/>
+            <a:ext cx="2017738" cy="1134977"/>
           </a:xfrm>
           <a:prstGeom prst="rect">
             <a:avLst/>
           </a:prstGeom>
         </p:spPr>
       </p:pic>
-      <p:sp>
-        <p:nvSpPr>
-          <p:cNvPr id="7" name="TextBox 6"/>
-          <p:cNvSpPr txBox="1"/>
-          <p:nvPr/>
-        </p:nvSpPr>
-        <p:spPr>
-          <a:xfrm>
-            <a:off x="731501" y="4457652"/>
-            <a:ext cx="10728693" cy="1371600"/>
-          </a:xfrm>
-          <a:prstGeom prst="rect">
-            <a:avLst/>
-          </a:prstGeom>
-          <a:noFill/>
-        </p:spPr>
-        <p:txBody>
-          <a:bodyPr wrap="square">
-            <a:spAutoFit/>
-          </a:bodyPr>
-          <a:lstStyle/>
-          <a:p>
-            <a:r>
-              <a:rPr sz="2600" b="1">
-                <a:solidFill>
-                  <a:srgbClr val="6E5AA6"/>
-                </a:solidFill>
-                <a:latin typeface="Calibri"/>
-              </a:rPr>
-              <a:t>“The goal isn’t to get more done. It’s to make the day more doable.”</a:t>
-            </a:r>
-          </a:p>
-          <a:p>
-            <a:r>
-              <a:rPr sz="1600">
-                <a:solidFill>
-                  <a:srgbClr val="695C82"/>
-                </a:solidFill>
-                <a:latin typeface="Calibri"/>
-              </a:rPr>
-              <a:t>Video file: myflove-demo-20s.mp4</a:t>
-            </a:r>
-          </a:p>
-        </p:txBody>
-      </p:sp>
     </p:spTree>
   </p:cSld>
   <p:clrMapOvr>
